--- a/courseware/202610_ADS_W09_Recursion_Backtracking_DSU.pptx
+++ b/courseware/202610_ADS_W09_Recursion_Backtracking_DSU.pptx
@@ -18251,7 +18251,7 @@
           </p:nvPr>
         </p:nvGraphicFramePr>
         <p:xfrm>
-          <a:off x="457200" y="2651760"/>
+          <a:off x="457200" y="2606040"/>
           <a:ext cx="8229600" cy="914400"/>
         </p:xfrm>
         <a:graphic>
@@ -18262,7 +18262,7 @@
                 <a:gridCol w="2194560"/>
                 <a:gridCol w="6035040"/>
               </a:tblGrid>
-              <a:tr h="457200">
+              <a:tr h="384048">
                 <a:tc>
                   <a:txBody>
                     <a:bodyPr/>
@@ -18400,7 +18400,7 @@
                   </a:tcPr>
                 </a:tc>
               </a:tr>
-              <a:tr h="457200">
+              <a:tr h="384048">
                 <a:tc>
                   <a:txBody>
                     <a:bodyPr/>
@@ -18538,7 +18538,7 @@
                   </a:tcPr>
                 </a:tc>
               </a:tr>
-              <a:tr h="457200">
+              <a:tr h="384048">
                 <a:tc>
                   <a:txBody>
                     <a:bodyPr/>
@@ -18556,7 +18556,7 @@
                           <a:ea typeface="Consolas" pitchFamily="34" charset="-122"/>
                           <a:cs typeface="Consolas" pitchFamily="34" charset="-120"/>
                         </a:rPr>
-                        <a:t>(2, 3, 1)</a:t>
+                        <a:t>(2, 3, 3)</a:t>
                       </a:r>
                       <a:endParaRPr lang="en-US" sz="1100" dirty="0">
                         <a:latin typeface="Consolas" charset="0"/>
@@ -18624,7 +18624,7 @@
                           <a:ea typeface="Microsoft YaHei" pitchFamily="34" charset="-122"/>
                           <a:cs typeface="Microsoft YaHei" pitchFamily="34" charset="-120"/>
                         </a:rPr>
-                        <a:t>假话：与之前 (2,1,2)(2,2,3) 推出的关系矛盾</a:t>
+                        <a:t>假话：x == y，「3 吃 3」自己吃自己</a:t>
                       </a:r>
                       <a:endParaRPr lang="en-US" sz="1100" dirty="0">
                         <a:latin typeface="Microsoft YaHei" charset="0"/>
@@ -18676,7 +18676,7 @@
                   </a:tcPr>
                 </a:tc>
               </a:tr>
-              <a:tr h="457200">
+              <a:tr h="384048">
                 <a:tc>
                   <a:txBody>
                     <a:bodyPr/>
@@ -18694,7 +18694,7 @@
                           <a:ea typeface="Consolas" pitchFamily="34" charset="-122"/>
                           <a:cs typeface="Consolas" pitchFamily="34" charset="-120"/>
                         </a:rPr>
-                        <a:t>(1, 5, 5)</a:t>
+                        <a:t>(1, 1, 3)</a:t>
                       </a:r>
                       <a:endParaRPr lang="en-US" sz="1100" dirty="0">
                         <a:latin typeface="Consolas" charset="0"/>
@@ -18762,7 +18762,7 @@
                           <a:ea typeface="Microsoft YaHei" pitchFamily="34" charset="-122"/>
                           <a:cs typeface="Microsoft YaHei" pitchFamily="34" charset="-120"/>
                         </a:rPr>
-                        <a:t>假话：x == y，「5 和 5 同类」这类自指也算假话</a:t>
+                        <a:t>假话：由 (2,1,2)(2,2,3) 推出 3 吃 1，1 与 3 不可能同类</a:t>
                       </a:r>
                       <a:endParaRPr lang="en-US" sz="1100" dirty="0">
                         <a:latin typeface="Microsoft YaHei" charset="0"/>
@@ -18810,6 +18810,144 @@
                     </a:lnB>
                     <a:solidFill>
                       <a:srgbClr val="FFFFFF"/>
+                    </a:solidFill>
+                  </a:tcPr>
+                </a:tc>
+              </a:tr>
+              <a:tr h="384048">
+                <a:tc>
+                  <a:txBody>
+                    <a:bodyPr/>
+                    <a:lstStyle/>
+                    <a:p>
+                      <a:pPr algn="l" indent="0" marL="0">
+                        <a:buNone/>
+                      </a:pPr>
+                      <a:r>
+                        <a:rPr lang="en-US" sz="1100" dirty="0">
+                          <a:solidFill>
+                            <a:srgbClr val="2B2B2B"/>
+                          </a:solidFill>
+                          <a:latin typeface="Consolas" pitchFamily="34" charset="0"/>
+                          <a:ea typeface="Consolas" pitchFamily="34" charset="-122"/>
+                          <a:cs typeface="Consolas" pitchFamily="34" charset="-120"/>
+                        </a:rPr>
+                        <a:t>(2, 3, 1)、(1, 5, 5)</a:t>
+                      </a:r>
+                      <a:endParaRPr lang="en-US" sz="1100" dirty="0">
+                        <a:latin typeface="Consolas" charset="0"/>
+                        <a:ea typeface="Consolas" charset="0"/>
+                        <a:cs typeface="Consolas" charset="0"/>
+                      </a:endParaRPr>
+                    </a:p>
+                  </a:txBody>
+                  <a:tcPr marL="63500" marR="63500" marT="25400" marB="25400" anchor="ctr">
+                    <a:lnL w="6350" cap="flat" cmpd="sng" algn="ctr">
+                      <a:solidFill>
+                        <a:srgbClr val="D5DDD9"/>
+                      </a:solidFill>
+                      <a:prstDash val="solid"/>
+                      <a:round/>
+                      <a:headEnd type="none" w="med" len="med"/>
+                      <a:tailEnd type="none" w="med" len="med"/>
+                    </a:lnL>
+                    <a:lnR w="6350" cap="flat" cmpd="sng" algn="ctr">
+                      <a:solidFill>
+                        <a:srgbClr val="D5DDD9"/>
+                      </a:solidFill>
+                      <a:prstDash val="solid"/>
+                      <a:round/>
+                      <a:headEnd type="none" w="med" len="med"/>
+                      <a:tailEnd type="none" w="med" len="med"/>
+                    </a:lnR>
+                    <a:lnT w="6350" cap="flat" cmpd="sng" algn="ctr">
+                      <a:solidFill>
+                        <a:srgbClr val="D5DDD9"/>
+                      </a:solidFill>
+                      <a:prstDash val="solid"/>
+                      <a:round/>
+                      <a:headEnd type="none" w="med" len="med"/>
+                      <a:tailEnd type="none" w="med" len="med"/>
+                    </a:lnT>
+                    <a:lnB w="6350" cap="flat" cmpd="sng" algn="ctr">
+                      <a:solidFill>
+                        <a:srgbClr val="D5DDD9"/>
+                      </a:solidFill>
+                      <a:prstDash val="solid"/>
+                      <a:round/>
+                      <a:headEnd type="none" w="med" len="med"/>
+                      <a:tailEnd type="none" w="med" len="med"/>
+                    </a:lnB>
+                    <a:solidFill>
+                      <a:srgbClr val="F7F9F8"/>
+                    </a:solidFill>
+                  </a:tcPr>
+                </a:tc>
+                <a:tc>
+                  <a:txBody>
+                    <a:bodyPr/>
+                    <a:lstStyle/>
+                    <a:p>
+                      <a:pPr algn="l" indent="0" marL="0">
+                        <a:buNone/>
+                      </a:pPr>
+                      <a:r>
+                        <a:rPr lang="en-US" sz="1100" dirty="0">
+                          <a:solidFill>
+                            <a:srgbClr val="2B2B2B"/>
+                          </a:solidFill>
+                          <a:latin typeface="Microsoft YaHei" pitchFamily="34" charset="0"/>
+                          <a:ea typeface="Microsoft YaHei" pitchFamily="34" charset="-122"/>
+                          <a:cs typeface="Microsoft YaHei" pitchFamily="34" charset="-120"/>
+                        </a:rPr>
+                        <a:t>真话：3 吃 1 与已知一致；「5 和 5 同类」本就成立</a:t>
+                      </a:r>
+                      <a:endParaRPr lang="en-US" sz="1100" dirty="0">
+                        <a:latin typeface="Microsoft YaHei" charset="0"/>
+                        <a:ea typeface="Microsoft YaHei" charset="0"/>
+                        <a:cs typeface="Microsoft YaHei" charset="0"/>
+                      </a:endParaRPr>
+                    </a:p>
+                  </a:txBody>
+                  <a:tcPr marL="63500" marR="63500" marT="25400" marB="25400" anchor="ctr">
+                    <a:lnL w="6350" cap="flat" cmpd="sng" algn="ctr">
+                      <a:solidFill>
+                        <a:srgbClr val="D5DDD9"/>
+                      </a:solidFill>
+                      <a:prstDash val="solid"/>
+                      <a:round/>
+                      <a:headEnd type="none" w="med" len="med"/>
+                      <a:tailEnd type="none" w="med" len="med"/>
+                    </a:lnL>
+                    <a:lnR w="6350" cap="flat" cmpd="sng" algn="ctr">
+                      <a:solidFill>
+                        <a:srgbClr val="D5DDD9"/>
+                      </a:solidFill>
+                      <a:prstDash val="solid"/>
+                      <a:round/>
+                      <a:headEnd type="none" w="med" len="med"/>
+                      <a:tailEnd type="none" w="med" len="med"/>
+                    </a:lnR>
+                    <a:lnT w="6350" cap="flat" cmpd="sng" algn="ctr">
+                      <a:solidFill>
+                        <a:srgbClr val="D5DDD9"/>
+                      </a:solidFill>
+                      <a:prstDash val="solid"/>
+                      <a:round/>
+                      <a:headEnd type="none" w="med" len="med"/>
+                      <a:tailEnd type="none" w="med" len="med"/>
+                    </a:lnT>
+                    <a:lnB w="6350" cap="flat" cmpd="sng" algn="ctr">
+                      <a:solidFill>
+                        <a:srgbClr val="D5DDD9"/>
+                      </a:solidFill>
+                      <a:prstDash val="solid"/>
+                      <a:round/>
+                      <a:headEnd type="none" w="med" len="med"/>
+                      <a:tailEnd type="none" w="med" len="med"/>
+                    </a:lnB>
+                    <a:solidFill>
+                      <a:srgbClr val="F7F9F8"/>
                     </a:solidFill>
                   </a:tcPr>
                 </a:tc>

--- a/courseware/202610_ADS_W09_Recursion_Backtracking_DSU.pptx
+++ b/courseware/202610_ADS_W09_Recursion_Backtracking_DSU.pptx
@@ -5516,18 +5516,18 @@
               <a:buNone/>
             </a:pPr>
             <a:r>
-              <a:rPr lang="en-US" sz="1300" dirty="0">
-                <a:solidFill>
-                  <a:srgbClr val="2B2B2B"/>
-                </a:solidFill>
-                <a:latin typeface="Microsoft YaHei" pitchFamily="34" charset="0"/>
-                <a:ea typeface="Microsoft YaHei" pitchFamily="34" charset="-122"/>
-                <a:cs typeface="Microsoft YaHei" pitchFamily="34" charset="-120"/>
-              </a:rPr>
-              <a:t>回溯的复杂度本质是</a:t>
-            </a:r>
-            <a:r>
-              <a:rPr lang="en-US" sz="1300" b="1" dirty="0">
+              <a:rPr lang="en-US" sz="1200" dirty="0">
+                <a:solidFill>
+                  <a:srgbClr val="2B2B2B"/>
+                </a:solidFill>
+                <a:latin typeface="Microsoft YaHei" pitchFamily="34" charset="0"/>
+                <a:ea typeface="Microsoft YaHei" pitchFamily="34" charset="-122"/>
+                <a:cs typeface="Microsoft YaHei" pitchFamily="34" charset="-120"/>
+              </a:rPr>
+              <a:t>回溯本质是</a:t>
+            </a:r>
+            <a:r>
+              <a:rPr lang="en-US" sz="1200" b="1" dirty="0">
                 <a:solidFill>
                   <a:srgbClr val="2B2B2B"/>
                 </a:solidFill>
@@ -5538,17 +5538,39 @@
               <a:t>指数级</a:t>
             </a:r>
             <a:r>
-              <a:rPr lang="en-US" sz="1300" dirty="0">
-                <a:solidFill>
-                  <a:srgbClr val="2B2B2B"/>
-                </a:solidFill>
-                <a:latin typeface="Microsoft YaHei" pitchFamily="34" charset="0"/>
-                <a:ea typeface="Microsoft YaHei" pitchFamily="34" charset="-122"/>
-                <a:cs typeface="Microsoft YaHei" pitchFamily="34" charset="-120"/>
-              </a:rPr>
-              <a:t>的，剪枝决定了它能不能跑完。</a:t>
-            </a:r>
-            <a:endParaRPr lang="en-US" sz="1300" dirty="0"/>
+              <a:rPr lang="en-US" sz="1200" dirty="0">
+                <a:solidFill>
+                  <a:srgbClr val="2B2B2B"/>
+                </a:solidFill>
+                <a:latin typeface="Microsoft YaHei" pitchFamily="34" charset="0"/>
+                <a:ea typeface="Microsoft YaHei" pitchFamily="34" charset="-122"/>
+                <a:cs typeface="Microsoft YaHei" pitchFamily="34" charset="-120"/>
+              </a:rPr>
+              <a:t>的。剪枝 = </a:t>
+            </a:r>
+            <a:r>
+              <a:rPr lang="en-US" sz="1200" b="1" dirty="0">
+                <a:solidFill>
+                  <a:srgbClr val="2B2B2B"/>
+                </a:solidFill>
+                <a:latin typeface="Microsoft YaHei" pitchFamily="34" charset="0"/>
+                <a:ea typeface="Microsoft YaHei" pitchFamily="34" charset="-122"/>
+                <a:cs typeface="Microsoft YaHei" pitchFamily="34" charset="-120"/>
+              </a:rPr>
+              <a:t>剪掉一整棵子树</a:t>
+            </a:r>
+            <a:r>
+              <a:rPr lang="en-US" sz="1200" dirty="0">
+                <a:solidFill>
+                  <a:srgbClr val="2B2B2B"/>
+                </a:solidFill>
+                <a:latin typeface="Microsoft YaHei" pitchFamily="34" charset="0"/>
+                <a:ea typeface="Microsoft YaHei" pitchFamily="34" charset="-122"/>
+                <a:cs typeface="Microsoft YaHei" pitchFamily="34" charset="-120"/>
+              </a:rPr>
+              <a:t>：时间看节点数，少走一个节点就省下它下面所有节点。</a:t>
+            </a:r>
+            <a:endParaRPr lang="en-US" sz="1200" dirty="0"/>
           </a:p>
         </p:txBody>
       </p:sp>
@@ -28871,7 +28893,7 @@
         <p:spPr>
           <a:xfrm>
             <a:off x="640080" y="1097280"/>
-            <a:ext cx="2743200" cy="292608"/>
+            <a:ext cx="3474720" cy="292608"/>
           </a:xfrm>
           <a:prstGeom prst="rect">
             <a:avLst/>
@@ -28895,7 +28917,7 @@
                 <a:ea typeface="Microsoft YaHei" pitchFamily="34" charset="-122"/>
                 <a:cs typeface="Microsoft YaHei" pitchFamily="34" charset="-120"/>
               </a:rPr>
-              <a:t>解空间树</a:t>
+              <a:t>解空间树 = 第 8 周的决策树</a:t>
             </a:r>
             <a:endParaRPr lang="en-US" sz="1200" dirty="0"/>
           </a:p>
@@ -29288,87 +29310,131 @@
           <a:p>
             <a:pPr marL="177800" indent="-177800">
               <a:spcAft>
-                <a:spcPts val="800"/>
+                <a:spcPts val="600"/>
               </a:spcAft>
               <a:buSzPct val="100000"/>
               <a:buChar char="•"/>
             </a:pPr>
             <a:r>
-              <a:rPr lang="en-US" sz="1250" dirty="0">
-                <a:solidFill>
-                  <a:srgbClr val="2B2B2B"/>
-                </a:solidFill>
-                <a:latin typeface="Microsoft YaHei" pitchFamily="34" charset="0"/>
-                <a:ea typeface="Microsoft YaHei" pitchFamily="34" charset="-122"/>
-                <a:cs typeface="Microsoft YaHei" pitchFamily="34" charset="-120"/>
-              </a:rPr>
-              <a:t>深度优先地搜索解空间树。</a:t>
-            </a:r>
-            <a:endParaRPr lang="en-US" sz="1250" dirty="0"/>
+              <a:rPr lang="en-US" sz="1150" dirty="0">
+                <a:solidFill>
+                  <a:srgbClr val="2B2B2B"/>
+                </a:solidFill>
+                <a:latin typeface="Microsoft YaHei" pitchFamily="34" charset="0"/>
+                <a:ea typeface="Microsoft YaHei" pitchFamily="34" charset="-122"/>
+                <a:cs typeface="Microsoft YaHei" pitchFamily="34" charset="-120"/>
+              </a:rPr>
+              <a:t>第 8 周的</a:t>
+            </a:r>
+            <a:r>
+              <a:rPr lang="en-US" sz="1150" b="1" dirty="0">
+                <a:solidFill>
+                  <a:srgbClr val="2B2B2B"/>
+                </a:solidFill>
+                <a:latin typeface="Microsoft YaHei" pitchFamily="34" charset="0"/>
+                <a:ea typeface="Microsoft YaHei" pitchFamily="34" charset="-122"/>
+                <a:cs typeface="Microsoft YaHei" pitchFamily="34" charset="-120"/>
+              </a:rPr>
+              <a:t>调用树</a:t>
+            </a:r>
+            <a:r>
+              <a:rPr lang="en-US" sz="1150" dirty="0">
+                <a:solidFill>
+                  <a:srgbClr val="2B2B2B"/>
+                </a:solidFill>
+                <a:latin typeface="Microsoft YaHei" pitchFamily="34" charset="0"/>
+                <a:ea typeface="Microsoft YaHei" pitchFamily="34" charset="-122"/>
+                <a:cs typeface="Microsoft YaHei" pitchFamily="34" charset="-120"/>
+              </a:rPr>
+              <a:t>：每次调用一个节点，执行顺序就是 DFS；</a:t>
+            </a:r>
+            <a:endParaRPr lang="en-US" sz="1150" dirty="0"/>
           </a:p>
           <a:p>
             <a:pPr marL="177800" indent="-177800">
               <a:spcAft>
-                <a:spcPts val="800"/>
+                <a:spcPts val="600"/>
               </a:spcAft>
               <a:buSzPct val="100000"/>
               <a:buChar char="•"/>
             </a:pPr>
             <a:r>
-              <a:rPr lang="en-US" sz="1250" dirty="0">
-                <a:solidFill>
-                  <a:srgbClr val="2B2B2B"/>
-                </a:solidFill>
-                <a:latin typeface="Microsoft YaHei" pitchFamily="34" charset="0"/>
-                <a:ea typeface="Microsoft YaHei" pitchFamily="34" charset="-122"/>
-                <a:cs typeface="Microsoft YaHei" pitchFamily="34" charset="-120"/>
-              </a:rPr>
-              <a:t>走到底或不合法就</a:t>
-            </a:r>
-            <a:r>
-              <a:rPr lang="en-US" sz="1250" b="1" dirty="0">
-                <a:solidFill>
-                  <a:srgbClr val="2B2B2B"/>
-                </a:solidFill>
-                <a:latin typeface="Microsoft YaHei" pitchFamily="34" charset="0"/>
-                <a:ea typeface="Microsoft YaHei" pitchFamily="34" charset="-122"/>
-                <a:cs typeface="Microsoft YaHei" pitchFamily="34" charset="-120"/>
-              </a:rPr>
-              <a:t>退回上一步</a:t>
-            </a:r>
-            <a:r>
-              <a:rPr lang="en-US" sz="1250" dirty="0">
-                <a:solidFill>
-                  <a:srgbClr val="2B2B2B"/>
-                </a:solidFill>
-                <a:latin typeface="Microsoft YaHei" pitchFamily="34" charset="0"/>
-                <a:ea typeface="Microsoft YaHei" pitchFamily="34" charset="-122"/>
-                <a:cs typeface="Microsoft YaHei" pitchFamily="34" charset="-120"/>
-              </a:rPr>
-              <a:t>（撤销刚才的选择）。</a:t>
-            </a:r>
-            <a:endParaRPr lang="en-US" sz="1250" dirty="0"/>
+              <a:rPr lang="en-US" sz="1150" dirty="0">
+                <a:solidFill>
+                  <a:srgbClr val="2B2B2B"/>
+                </a:solidFill>
+                <a:latin typeface="Microsoft YaHei" pitchFamily="34" charset="0"/>
+                <a:ea typeface="Microsoft YaHei" pitchFamily="34" charset="-122"/>
+                <a:cs typeface="Microsoft YaHei" pitchFamily="34" charset="-120"/>
+              </a:rPr>
+              <a:t>每层做一次选择，它就是</a:t>
+            </a:r>
+            <a:r>
+              <a:rPr lang="en-US" sz="1150" b="1" dirty="0">
+                <a:solidFill>
+                  <a:srgbClr val="2B2B2B"/>
+                </a:solidFill>
+                <a:latin typeface="Microsoft YaHei" pitchFamily="34" charset="0"/>
+                <a:ea typeface="Microsoft YaHei" pitchFamily="34" charset="-122"/>
+                <a:cs typeface="Microsoft YaHei" pitchFamily="34" charset="-120"/>
+              </a:rPr>
+              <a:t>决策树</a:t>
+            </a:r>
+            <a:r>
+              <a:rPr lang="en-US" sz="1150" dirty="0">
+                <a:solidFill>
+                  <a:srgbClr val="2B2B2B"/>
+                </a:solidFill>
+                <a:latin typeface="Microsoft YaHei" pitchFamily="34" charset="0"/>
+                <a:ea typeface="Microsoft YaHei" pitchFamily="34" charset="-122"/>
+                <a:cs typeface="Microsoft YaHei" pitchFamily="34" charset="-120"/>
+              </a:rPr>
+              <a:t>，也叫解空间树；</a:t>
+            </a:r>
+            <a:endParaRPr lang="en-US" sz="1150" dirty="0"/>
           </a:p>
           <a:p>
             <a:pPr marL="177800" indent="-177800">
               <a:spcAft>
-                <a:spcPts val="800"/>
+                <a:spcPts val="600"/>
               </a:spcAft>
               <a:buSzPct val="100000"/>
               <a:buChar char="•"/>
             </a:pPr>
             <a:r>
-              <a:rPr lang="en-US" sz="1250" dirty="0">
-                <a:solidFill>
-                  <a:srgbClr val="2B2B2B"/>
-                </a:solidFill>
-                <a:latin typeface="Microsoft YaHei" pitchFamily="34" charset="0"/>
-                <a:ea typeface="Microsoft YaHei" pitchFamily="34" charset="-122"/>
-                <a:cs typeface="Microsoft YaHei" pitchFamily="34" charset="-120"/>
-              </a:rPr>
-              <a:t>再换一个选择继续走。</a:t>
-            </a:r>
-            <a:endParaRPr lang="en-US" sz="1250" dirty="0"/>
+              <a:rPr lang="en-US" sz="1150" dirty="0">
+                <a:solidFill>
+                  <a:srgbClr val="2B2B2B"/>
+                </a:solidFill>
+                <a:latin typeface="Microsoft YaHei" pitchFamily="34" charset="0"/>
+                <a:ea typeface="Microsoft YaHei" pitchFamily="34" charset="-122"/>
+                <a:cs typeface="Microsoft YaHei" pitchFamily="34" charset="-120"/>
+              </a:rPr>
+              <a:t>走到底或不合法就</a:t>
+            </a:r>
+            <a:r>
+              <a:rPr lang="en-US" sz="1150" b="1" dirty="0">
+                <a:solidFill>
+                  <a:srgbClr val="2B2B2B"/>
+                </a:solidFill>
+                <a:latin typeface="Microsoft YaHei" pitchFamily="34" charset="0"/>
+                <a:ea typeface="Microsoft YaHei" pitchFamily="34" charset="-122"/>
+                <a:cs typeface="Microsoft YaHei" pitchFamily="34" charset="-120"/>
+              </a:rPr>
+              <a:t>退回上一步</a:t>
+            </a:r>
+            <a:r>
+              <a:rPr lang="en-US" sz="1150" dirty="0">
+                <a:solidFill>
+                  <a:srgbClr val="2B2B2B"/>
+                </a:solidFill>
+                <a:latin typeface="Microsoft YaHei" pitchFamily="34" charset="0"/>
+                <a:ea typeface="Microsoft YaHei" pitchFamily="34" charset="-122"/>
+                <a:cs typeface="Microsoft YaHei" pitchFamily="34" charset="-120"/>
+              </a:rPr>
+              <a:t>，撤销刚才的选择，再换一个继续走。</a:t>
+            </a:r>
+            <a:endParaRPr lang="en-US" sz="1150" dirty="0"/>
           </a:p>
         </p:txBody>
       </p:sp>
@@ -30025,6 +30091,23 @@
             </a:r>
             <a:endParaRPr lang="en-US" sz="1150" dirty="0"/>
           </a:p>
+          <a:p>
+            <a:pPr algn="l" indent="0" marL="0">
+              <a:buNone/>
+            </a:pPr>
+            <a:r>
+              <a:rPr lang="en-US" sz="1150" dirty="0">
+                <a:solidFill>
+                  <a:srgbClr val="2B2B2B"/>
+                </a:solidFill>
+                <a:latin typeface="Microsoft YaHei" pitchFamily="34" charset="0"/>
+                <a:ea typeface="Microsoft YaHei" pitchFamily="34" charset="-122"/>
+                <a:cs typeface="Microsoft YaHei" pitchFamily="34" charset="-120"/>
+              </a:rPr>
+              <a:t>树上：根到当前节点的路径</a:t>
+            </a:r>
+            <a:endParaRPr lang="en-US" sz="1150" dirty="0"/>
+          </a:p>
         </p:txBody>
       </p:sp>
       <p:sp>
@@ -30184,6 +30267,23 @@
             </a:r>
             <a:endParaRPr lang="en-US" sz="1150" dirty="0"/>
           </a:p>
+          <a:p>
+            <a:pPr algn="l" indent="0" marL="0">
+              <a:buNone/>
+            </a:pPr>
+            <a:r>
+              <a:rPr lang="en-US" sz="1150" dirty="0">
+                <a:solidFill>
+                  <a:srgbClr val="2B2B2B"/>
+                </a:solidFill>
+                <a:latin typeface="Microsoft YaHei" pitchFamily="34" charset="0"/>
+                <a:ea typeface="Microsoft YaHei" pitchFamily="34" charset="-122"/>
+                <a:cs typeface="Microsoft YaHei" pitchFamily="34" charset="-120"/>
+              </a:rPr>
+              <a:t>树上：当前节点有哪些孩子</a:t>
+            </a:r>
+            <a:endParaRPr lang="en-US" sz="1150" dirty="0"/>
+          </a:p>
         </p:txBody>
       </p:sp>
       <p:sp>
@@ -30340,6 +30440,23 @@
                 <a:cs typeface="Microsoft YaHei" pitchFamily="34" charset="-120"/>
               </a:rPr>
               <a:t>什么时候该收一个答案</a:t>
+            </a:r>
+            <a:endParaRPr lang="en-US" sz="1150" dirty="0"/>
+          </a:p>
+          <a:p>
+            <a:pPr algn="l" indent="0" marL="0">
+              <a:buNone/>
+            </a:pPr>
+            <a:r>
+              <a:rPr lang="en-US" sz="1150" dirty="0">
+                <a:solidFill>
+                  <a:srgbClr val="2B2B2B"/>
+                </a:solidFill>
+                <a:latin typeface="Microsoft YaHei" pitchFamily="34" charset="0"/>
+                <a:ea typeface="Microsoft YaHei" pitchFamily="34" charset="-122"/>
+                <a:cs typeface="Microsoft YaHei" pitchFamily="34" charset="-120"/>
+              </a:rPr>
+              <a:t>树上：走到叶子</a:t>
             </a:r>
             <a:endParaRPr lang="en-US" sz="1150" dirty="0"/>
           </a:p>
@@ -31433,11 +31550,11 @@
         <p:spPr>
           <a:xfrm>
             <a:off x="5852160" y="2423160"/>
-            <a:ext cx="2834640" cy="1554480"/>
+            <a:ext cx="2834640" cy="2148840"/>
           </a:xfrm>
           <a:prstGeom prst="roundRect">
             <a:avLst>
-              <a:gd name="adj" fmla="val 4706"/>
+              <a:gd name="adj" fmla="val 3404"/>
             </a:avLst>
           </a:prstGeom>
           <a:solidFill>
@@ -31494,7 +31611,7 @@
         <p:spPr>
           <a:xfrm>
             <a:off x="5989320" y="2807208"/>
-            <a:ext cx="2560320" cy="1097280"/>
+            <a:ext cx="2560320" cy="1691640"/>
           </a:xfrm>
           <a:prstGeom prst="rect">
             <a:avLst/>
@@ -31513,7 +31630,7 @@
               <a:buNone/>
             </a:pPr>
             <a:r>
-              <a:rPr lang="en-US" sz="1100" dirty="0">
+              <a:rPr lang="en-US" sz="1050" dirty="0">
                 <a:solidFill>
                   <a:srgbClr val="2B2B2B"/>
                 </a:solidFill>
@@ -31524,7 +31641,7 @@
               <a:t>子集不需要走到叶子才收——</a:t>
             </a:r>
             <a:r>
-              <a:rPr lang="en-US" sz="1100" b="1" dirty="0">
+              <a:rPr lang="en-US" sz="1050" b="1" dirty="0">
                 <a:solidFill>
                   <a:srgbClr val="3E7C68"/>
                 </a:solidFill>
@@ -31535,7 +31652,7 @@
               <a:t>dfs</a:t>
             </a:r>
             <a:r>
-              <a:rPr lang="en-US" sz="1100" dirty="0">
+              <a:rPr lang="en-US" sz="1050" dirty="0">
                 <a:solidFill>
                   <a:srgbClr val="2B2B2B"/>
                 </a:solidFill>
@@ -31546,7 +31663,7 @@
               <a:t> 一进来就 </a:t>
             </a:r>
             <a:r>
-              <a:rPr lang="en-US" sz="1100" b="1" dirty="0">
+              <a:rPr lang="en-US" sz="1050" b="1" dirty="0">
                 <a:solidFill>
                   <a:srgbClr val="3E7C68"/>
                 </a:solidFill>
@@ -31557,17 +31674,17 @@
               <a:t>append</a:t>
             </a:r>
             <a:r>
-              <a:rPr lang="en-US" sz="1100" dirty="0">
-                <a:solidFill>
-                  <a:srgbClr val="2B2B2B"/>
-                </a:solidFill>
-                <a:latin typeface="Microsoft YaHei" pitchFamily="34" charset="0"/>
-                <a:ea typeface="Microsoft YaHei" pitchFamily="34" charset="-122"/>
-                <a:cs typeface="Microsoft YaHei" pitchFamily="34" charset="-120"/>
-              </a:rPr>
-              <a:t>，因为「选到这里就停」本身就是一个合法子集。</a:t>
-            </a:r>
-            <a:endParaRPr lang="en-US" sz="1100" dirty="0"/>
+              <a:rPr lang="en-US" sz="1050" dirty="0">
+                <a:solidFill>
+                  <a:srgbClr val="2B2B2B"/>
+                </a:solidFill>
+                <a:latin typeface="Microsoft YaHei" pitchFamily="34" charset="0"/>
+                <a:ea typeface="Microsoft YaHei" pitchFamily="34" charset="-122"/>
+                <a:cs typeface="Microsoft YaHei" pitchFamily="34" charset="-120"/>
+              </a:rPr>
+              <a:t>，因为「选到这里就停」本身就是一个合法子集。对比第 8 周 §3.4 的「选或不选」：那棵树每层决定一个元素，只有叶子是答案。同一个问题，换了一棵树。</a:t>
+            </a:r>
+            <a:endParaRPr lang="en-US" sz="1050" dirty="0"/>
           </a:p>
         </p:txBody>
       </p:sp>

--- a/courseware/202610_ADS_W09_Recursion_Backtracking_DSU.pptx
+++ b/courseware/202610_ADS_W09_Recursion_Backtracking_DSU.pptx
@@ -30456,7 +30456,7 @@
                 <a:ea typeface="Microsoft YaHei" pitchFamily="34" charset="-122"/>
                 <a:cs typeface="Microsoft YaHei" pitchFamily="34" charset="-120"/>
               </a:rPr>
-              <a:t>树上：走到叶子</a:t>
+              <a:t>树上：走到叶子（或该收答案的节点）</a:t>
             </a:r>
             <a:endParaRPr lang="en-US" sz="1150" dirty="0"/>
           </a:p>
